--- a/single_day/slides/04_track_a_gem_hunter.pptx
+++ b/single_day/slides/04_track_a_gem_hunter.pptx
@@ -4701,7 +4701,7 @@
                 <a:ea typeface="Arial" pitchFamily="34" charset="-122"/>
                 <a:cs typeface="Arial" pitchFamily="34" charset="-120"/>
               </a:rPr>
-              <a:t>The proof uses the same command: eval 'Match3.LevelData.Instance.RemainingMove'.</a:t>
+              <a:t>The proof uses the same command: eval 'return Match3.LevelData.Instance.RemainingMove;'.</a:t>
             </a:r>
             <a:endParaRPr lang="en-US" sz="1300" dirty="0"/>
           </a:p>
@@ -6322,7 +6322,7 @@
                 <a:ea typeface="Arial" pitchFamily="34" charset="-122"/>
                 <a:cs typeface="Arial" pitchFamily="34" charset="-120"/>
               </a:rPr>
-              <a:t>Demo: unity command build + build_status; LevelList's build preprocessor is read from the source.</a:t>
+              <a:t>Demo: unity command build + build_status; the LevelList preprocessor is read from the source — it stops the build once if Build Settings drift.</a:t>
             </a:r>
             <a:endParaRPr lang="en-US" sz="1200" dirty="0"/>
           </a:p>

--- a/single_day/slides/04_track_a_gem_hunter.pptx
+++ b/single_day/slides/04_track_a_gem_hunter.pptx
@@ -6322,7 +6322,7 @@
                 <a:ea typeface="Arial" pitchFamily="34" charset="-122"/>
                 <a:cs typeface="Arial" pitchFamily="34" charset="-120"/>
               </a:rPr>
-              <a:t>Demo: unity command build + build_status; the LevelList preprocessor is read from the source — it stops the build once if Build Settings drift.</a:t>
+              <a:t>Demo: unity command build + build_status via the live editor; the LevelList preprocessor is read from the source. The CI twin: unity build on a closed project.</a:t>
             </a:r>
             <a:endParaRPr lang="en-US" sz="1200" dirty="0"/>
           </a:p>
